--- a/仕様書/NPC.pptx
+++ b/仕様書/NPC.pptx
@@ -104,6 +104,11 @@
       </a:defRPr>
     </a:lvl9pPr>
   </p:defaultTextStyle>
+  <p:extLst>
+    <p:ext uri="{EFAFB233-063F-42B5-8137-9DF3F51BA10A}">
+      <p15:sldGuideLst xmlns:p15="http://schemas.microsoft.com/office/powerpoint/2012/main"/>
+    </p:ext>
+  </p:extLst>
 </p:presentation>
 </file>
 
@@ -112,12 +117,12 @@
   <pc:docChgLst>
     <pc:chgData name="黒沢　爽次" userId="fae486ef-0c84-45a4-a237-2d2b758b0e89" providerId="ADAL" clId="{9BD741BE-1803-4E93-BF75-3AA969D2FB72}"/>
     <pc:docChg chg="custSel addSld modSld">
-      <pc:chgData name="黒沢　爽次" userId="fae486ef-0c84-45a4-a237-2d2b758b0e89" providerId="ADAL" clId="{9BD741BE-1803-4E93-BF75-3AA969D2FB72}" dt="2026-06-02T03:24:43.007" v="159" actId="20577"/>
+      <pc:chgData name="黒沢　爽次" userId="fae486ef-0c84-45a4-a237-2d2b758b0e89" providerId="ADAL" clId="{9BD741BE-1803-4E93-BF75-3AA969D2FB72}" dt="2026-06-04T00:31:47.657" v="160" actId="20577"/>
       <pc:docMkLst>
         <pc:docMk/>
       </pc:docMkLst>
       <pc:sldChg chg="addSp delSp modSp new mod">
-        <pc:chgData name="黒沢　爽次" userId="fae486ef-0c84-45a4-a237-2d2b758b0e89" providerId="ADAL" clId="{9BD741BE-1803-4E93-BF75-3AA969D2FB72}" dt="2026-06-02T03:24:43.007" v="159" actId="20577"/>
+        <pc:chgData name="黒沢　爽次" userId="fae486ef-0c84-45a4-a237-2d2b758b0e89" providerId="ADAL" clId="{9BD741BE-1803-4E93-BF75-3AA969D2FB72}" dt="2026-06-04T00:31:47.657" v="160" actId="20577"/>
         <pc:sldMkLst>
           <pc:docMk/>
           <pc:sldMk cId="1203921747" sldId="256"/>
@@ -147,7 +152,7 @@
           </ac:spMkLst>
         </pc:spChg>
         <pc:spChg chg="add mod">
-          <ac:chgData name="黒沢　爽次" userId="fae486ef-0c84-45a4-a237-2d2b758b0e89" providerId="ADAL" clId="{9BD741BE-1803-4E93-BF75-3AA969D2FB72}" dt="2026-06-02T03:24:43.007" v="159" actId="20577"/>
+          <ac:chgData name="黒沢　爽次" userId="fae486ef-0c84-45a4-a237-2d2b758b0e89" providerId="ADAL" clId="{9BD741BE-1803-4E93-BF75-3AA969D2FB72}" dt="2026-06-04T00:31:47.657" v="160" actId="20577"/>
           <ac:spMkLst>
             <pc:docMk/>
             <pc:sldMk cId="1203921747" sldId="256"/>
@@ -666,7 +671,7 @@
         <p:spPr>
           <a:xfrm>
             <a:off x="2113808" y="2125683"/>
-            <a:ext cx="6474849" cy="1200329"/>
+            <a:ext cx="6474849" cy="1477328"/>
           </a:xfrm>
           <a:prstGeom prst="rect">
             <a:avLst/>
@@ -716,11 +721,17 @@
               <a:buFont typeface="Arial" panose="020B0604020202020204" pitchFamily="34" charset="0"/>
               <a:buChar char="•"/>
             </a:pPr>
+            <a:endParaRPr lang="en-US" altLang="ja-JP" dirty="0"/>
+          </a:p>
+          <a:p>
+            <a:pPr marL="285750" indent="-285750">
+              <a:buFont typeface="Arial" panose="020B0604020202020204" pitchFamily="34" charset="0"/>
+              <a:buChar char="•"/>
+            </a:pPr>
             <a:r>
-              <a:rPr kumimoji="1" lang="ja-JP" altLang="en-US"/>
+              <a:rPr kumimoji="1" lang="ja-JP" altLang="en-US" dirty="0"/>
               <a:t>強さ設定</a:t>
             </a:r>
-            <a:endParaRPr kumimoji="1" lang="ja-JP" altLang="en-US" dirty="0"/>
           </a:p>
         </p:txBody>
       </p:sp>
